--- a/07_빅데이터수집시스템개발_노가희.pptx
+++ b/07_빅데이터수집시스템개발_노가희.pptx
@@ -1888,36 +1888,6 @@
           <a:chExt cx="0" cy="0"/>
         </a:xfrm>
       </p:grpSpPr>
-      <p:pic>
-        <p:nvPicPr>
-          <p:cNvPr id="5" name="그림 4">
-            <a:extLst>
-              <a:ext uri="{FF2B5EF4-FFF2-40B4-BE49-F238E27FC236}">
-                <a16:creationId xmlns:a16="http://schemas.microsoft.com/office/drawing/2014/main" id="{AED8360D-6FF8-4969-93BF-7C1F3B1882BC}"/>
-              </a:ext>
-            </a:extLst>
-          </p:cNvPr>
-          <p:cNvPicPr>
-            <a:picLocks noChangeAspect="1"/>
-          </p:cNvPicPr>
-          <p:nvPr/>
-        </p:nvPicPr>
-        <p:blipFill>
-          <a:blip r:embed="rId2"/>
-          <a:stretch>
-            <a:fillRect/>
-          </a:stretch>
-        </p:blipFill>
-        <p:spPr>
-          <a:xfrm>
-            <a:off x="4055576" y="105797"/>
-            <a:ext cx="7920000" cy="6307745"/>
-          </a:xfrm>
-          <a:prstGeom prst="rect">
-            <a:avLst/>
-          </a:prstGeom>
-        </p:spPr>
-      </p:pic>
       <p:sp>
         <p:nvSpPr>
           <p:cNvPr id="6" name="TextBox 5">
@@ -1961,6 +1931,36 @@
           </a:p>
         </p:txBody>
       </p:sp>
+      <p:pic>
+        <p:nvPicPr>
+          <p:cNvPr id="3" name="그림 2">
+            <a:extLst>
+              <a:ext uri="{FF2B5EF4-FFF2-40B4-BE49-F238E27FC236}">
+                <a16:creationId xmlns:a16="http://schemas.microsoft.com/office/drawing/2014/main" id="{E4777A3B-8ACE-4EDA-AA4C-2663B76245A5}"/>
+              </a:ext>
+            </a:extLst>
+          </p:cNvPr>
+          <p:cNvPicPr>
+            <a:picLocks/>
+          </p:cNvPicPr>
+          <p:nvPr/>
+        </p:nvPicPr>
+        <p:blipFill>
+          <a:blip r:embed="rId2"/>
+          <a:stretch>
+            <a:fillRect/>
+          </a:stretch>
+        </p:blipFill>
+        <p:spPr>
+          <a:xfrm>
+            <a:off x="3768661" y="58723"/>
+            <a:ext cx="7920000" cy="6336000"/>
+          </a:xfrm>
+          <a:prstGeom prst="rect">
+            <a:avLst/>
+          </a:prstGeom>
+        </p:spPr>
+      </p:pic>
     </p:spTree>
     <p:extLst>
       <p:ext uri="{BB962C8B-B14F-4D97-AF65-F5344CB8AC3E}">
@@ -1991,36 +1991,6 @@
           <a:chExt cx="0" cy="0"/>
         </a:xfrm>
       </p:grpSpPr>
-      <p:pic>
-        <p:nvPicPr>
-          <p:cNvPr id="3" name="그림 2">
-            <a:extLst>
-              <a:ext uri="{FF2B5EF4-FFF2-40B4-BE49-F238E27FC236}">
-                <a16:creationId xmlns:a16="http://schemas.microsoft.com/office/drawing/2014/main" id="{9E8C4DBB-F478-474B-9FAC-945DFF7E199E}"/>
-              </a:ext>
-            </a:extLst>
-          </p:cNvPr>
-          <p:cNvPicPr>
-            <a:picLocks noChangeAspect="1"/>
-          </p:cNvPicPr>
-          <p:nvPr/>
-        </p:nvPicPr>
-        <p:blipFill>
-          <a:blip r:embed="rId2"/>
-          <a:stretch>
-            <a:fillRect/>
-          </a:stretch>
-        </p:blipFill>
-        <p:spPr>
-          <a:xfrm>
-            <a:off x="4048853" y="104430"/>
-            <a:ext cx="7933334" cy="6300000"/>
-          </a:xfrm>
-          <a:prstGeom prst="rect">
-            <a:avLst/>
-          </a:prstGeom>
-        </p:spPr>
-      </p:pic>
       <p:sp>
         <p:nvSpPr>
           <p:cNvPr id="5" name="TextBox 4">
@@ -2064,6 +2034,36 @@
           </a:p>
         </p:txBody>
       </p:sp>
+      <p:pic>
+        <p:nvPicPr>
+          <p:cNvPr id="4" name="그림 3">
+            <a:extLst>
+              <a:ext uri="{FF2B5EF4-FFF2-40B4-BE49-F238E27FC236}">
+                <a16:creationId xmlns:a16="http://schemas.microsoft.com/office/drawing/2014/main" id="{5DEDFF19-7466-4960-B2B3-BB4C56B850FE}"/>
+              </a:ext>
+            </a:extLst>
+          </p:cNvPr>
+          <p:cNvPicPr>
+            <a:picLocks/>
+          </p:cNvPicPr>
+          <p:nvPr/>
+        </p:nvPicPr>
+        <p:blipFill>
+          <a:blip r:embed="rId2"/>
+          <a:stretch>
+            <a:fillRect/>
+          </a:stretch>
+        </p:blipFill>
+        <p:spPr>
+          <a:xfrm>
+            <a:off x="3768661" y="58723"/>
+            <a:ext cx="7920000" cy="6336000"/>
+          </a:xfrm>
+          <a:prstGeom prst="rect">
+            <a:avLst/>
+          </a:prstGeom>
+        </p:spPr>
+      </p:pic>
     </p:spTree>
     <p:extLst>
       <p:ext uri="{BB962C8B-B14F-4D97-AF65-F5344CB8AC3E}">
